--- a/guides/setup_development_environment.pptx
+++ b/guides/setup_development_environment.pptx
@@ -5,7 +5,7 @@
     <p:sldMasterId id="2147483648" r:id="rId1"/>
   </p:sldMasterIdLst>
   <p:notesMasterIdLst>
-    <p:notesMasterId r:id="rId20"/>
+    <p:notesMasterId r:id="rId21"/>
   </p:notesMasterIdLst>
   <p:sldIdLst>
     <p:sldId id="259" r:id="rId2"/>
@@ -21,11 +21,12 @@
     <p:sldId id="329" r:id="rId12"/>
     <p:sldId id="326" r:id="rId13"/>
     <p:sldId id="331" r:id="rId14"/>
-    <p:sldId id="332" r:id="rId15"/>
-    <p:sldId id="327" r:id="rId16"/>
-    <p:sldId id="333" r:id="rId17"/>
-    <p:sldId id="335" r:id="rId18"/>
-    <p:sldId id="336" r:id="rId19"/>
+    <p:sldId id="338" r:id="rId15"/>
+    <p:sldId id="332" r:id="rId16"/>
+    <p:sldId id="327" r:id="rId17"/>
+    <p:sldId id="333" r:id="rId18"/>
+    <p:sldId id="335" r:id="rId19"/>
+    <p:sldId id="337" r:id="rId20"/>
   </p:sldIdLst>
   <p:sldSz cx="12192000" cy="6858000"/>
   <p:notesSz cx="6858000" cy="9144000"/>
@@ -217,7 +218,7 @@
           <a:p>
             <a:fld id="{81C4B3FE-0320-8142-8396-5C3025C019EC}" type="datetimeFigureOut">
               <a:rPr lang="en-IT" smtClean="0"/>
-              <a:t>2/11/25</a:t>
+              <a:t>2/4/26</a:t>
             </a:fld>
             <a:endParaRPr lang="en-IT"/>
           </a:p>
@@ -1722,7 +1723,7 @@
               <a:rPr lang="it-IT" sz="2800" dirty="0">
                 <a:latin typeface="Aptos" panose="020B0004020202020204" pitchFamily="34" charset="0"/>
               </a:rPr>
-              <a:t>A.Y. 2024-2025</a:t>
+              <a:t>A.Y. 2025-2026</a:t>
             </a:r>
           </a:p>
         </p:txBody>
@@ -4365,11 +4366,7 @@
           <a:p>
             <a:r>
               <a:rPr lang="en-US" dirty="0"/>
-              <a:t>(Mac) 4. Flutter and </a:t>
-            </a:r>
-            <a:r>
-              <a:rPr lang="en-US" dirty="0" err="1"/>
-              <a:t>Cocoapods</a:t>
+              <a:t>(Mac) 4. Flutter</a:t>
             </a:r>
             <a:endParaRPr lang="en-IT" dirty="0"/>
           </a:p>
@@ -4418,7 +4415,7 @@
                 <a:ea typeface="Palatino" pitchFamily="2" charset="77"/>
                 <a:hlinkClick r:id="rId2"/>
               </a:rPr>
-              <a:t>https://docs.flutter.dev/get-started/install/macos/mobile-ios?tab=vscode#install-the-flutter-sdk</a:t>
+              <a:t>https://docs.flutter.dev/install/quick#install</a:t>
             </a:r>
             <a:r>
               <a:rPr lang="en-GB" dirty="0">
@@ -4445,7 +4442,7 @@
               <a:rPr lang="en-GB" dirty="0">
                 <a:ea typeface="Palatino" pitchFamily="2" charset="77"/>
               </a:rPr>
-              <a:t>Follow the instructions from section ”Install the Flutter SDK” to the end </a:t>
+              <a:t>Follow the instructions from section ”Install and set up Flutter” to the end </a:t>
             </a:r>
           </a:p>
         </p:txBody>
@@ -4556,6 +4553,196 @@
   <p:cSld>
     <p:spTree>
       <p:nvGrpSpPr>
+        <p:cNvPr id="1" name="">
+          <a:extLst>
+            <a:ext uri="{FF2B5EF4-FFF2-40B4-BE49-F238E27FC236}">
+              <a16:creationId xmlns:a16="http://schemas.microsoft.com/office/drawing/2014/main" id="{1B6613BB-239A-A1E9-7DCB-190C1671A964}"/>
+            </a:ext>
+          </a:extLst>
+        </p:cNvPr>
+        <p:cNvGrpSpPr/>
+        <p:nvPr/>
+      </p:nvGrpSpPr>
+      <p:grpSpPr>
+        <a:xfrm>
+          <a:off x="0" y="0"/>
+          <a:ext cx="0" cy="0"/>
+          <a:chOff x="0" y="0"/>
+          <a:chExt cx="0" cy="0"/>
+        </a:xfrm>
+      </p:grpSpPr>
+      <p:sp>
+        <p:nvSpPr>
+          <p:cNvPr id="2" name="Title 1">
+            <a:extLst>
+              <a:ext uri="{FF2B5EF4-FFF2-40B4-BE49-F238E27FC236}">
+                <a16:creationId xmlns:a16="http://schemas.microsoft.com/office/drawing/2014/main" id="{58B0335F-C221-3B0D-B7FF-03A5A8F39DD2}"/>
+              </a:ext>
+            </a:extLst>
+          </p:cNvPr>
+          <p:cNvSpPr>
+            <a:spLocks noGrp="1"/>
+          </p:cNvSpPr>
+          <p:nvPr>
+            <p:ph type="title"/>
+          </p:nvPr>
+        </p:nvSpPr>
+        <p:spPr/>
+        <p:txBody>
+          <a:bodyPr/>
+          <a:lstStyle/>
+          <a:p>
+            <a:r>
+              <a:rPr lang="en-US" dirty="0"/>
+              <a:t>(Mac) 5. iOS support</a:t>
+            </a:r>
+            <a:endParaRPr lang="en-IT" dirty="0"/>
+          </a:p>
+        </p:txBody>
+      </p:sp>
+      <p:sp>
+        <p:nvSpPr>
+          <p:cNvPr id="3" name="Content Placeholder 2">
+            <a:extLst>
+              <a:ext uri="{FF2B5EF4-FFF2-40B4-BE49-F238E27FC236}">
+                <a16:creationId xmlns:a16="http://schemas.microsoft.com/office/drawing/2014/main" id="{79651658-C3D7-050F-7E76-2DBDF8C9E1A6}"/>
+              </a:ext>
+            </a:extLst>
+          </p:cNvPr>
+          <p:cNvSpPr>
+            <a:spLocks noGrp="1"/>
+          </p:cNvSpPr>
+          <p:nvPr>
+            <p:ph sz="half" idx="1"/>
+          </p:nvPr>
+        </p:nvSpPr>
+        <p:spPr>
+          <a:xfrm>
+            <a:off x="428172" y="1364342"/>
+            <a:ext cx="10081642" cy="2918291"/>
+          </a:xfrm>
+        </p:spPr>
+        <p:txBody>
+          <a:bodyPr>
+            <a:normAutofit/>
+          </a:bodyPr>
+          <a:lstStyle/>
+          <a:p>
+            <a:pPr marL="457200" indent="-457200">
+              <a:buFont typeface="+mj-lt"/>
+              <a:buAutoNum type="arabicPeriod"/>
+            </a:pPr>
+            <a:r>
+              <a:rPr lang="en-GB" dirty="0">
+                <a:ea typeface="Palatino" pitchFamily="2" charset="77"/>
+              </a:rPr>
+              <a:t>Go to </a:t>
+            </a:r>
+            <a:r>
+              <a:rPr lang="en-GB" dirty="0">
+                <a:ea typeface="Palatino" pitchFamily="2" charset="77"/>
+                <a:hlinkClick r:id="rId2"/>
+              </a:rPr>
+              <a:t>https://docs.flutter.dev/platform-integration/ios/setup</a:t>
+            </a:r>
+            <a:r>
+              <a:rPr lang="en-GB" dirty="0">
+                <a:ea typeface="Palatino" pitchFamily="2" charset="77"/>
+              </a:rPr>
+              <a:t> </a:t>
+            </a:r>
+          </a:p>
+          <a:p>
+            <a:pPr marL="457200" indent="-457200">
+              <a:buFont typeface="+mj-lt"/>
+              <a:buAutoNum type="arabicPeriod"/>
+            </a:pPr>
+            <a:r>
+              <a:rPr lang="en-GB" dirty="0">
+                <a:ea typeface="Palatino" pitchFamily="2" charset="77"/>
+              </a:rPr>
+              <a:t>Follow the instructions from section ”Set up iOS tooling” to the end </a:t>
+            </a:r>
+          </a:p>
+        </p:txBody>
+      </p:sp>
+      <p:sp>
+        <p:nvSpPr>
+          <p:cNvPr id="4" name="Slide Number Placeholder 3">
+            <a:extLst>
+              <a:ext uri="{FF2B5EF4-FFF2-40B4-BE49-F238E27FC236}">
+                <a16:creationId xmlns:a16="http://schemas.microsoft.com/office/drawing/2014/main" id="{3E415CB0-F2DB-CDE6-E72E-559822CC18A6}"/>
+              </a:ext>
+            </a:extLst>
+          </p:cNvPr>
+          <p:cNvSpPr>
+            <a:spLocks noGrp="1"/>
+          </p:cNvSpPr>
+          <p:nvPr>
+            <p:ph type="sldNum" sz="quarter" idx="12"/>
+          </p:nvPr>
+        </p:nvSpPr>
+        <p:spPr/>
+        <p:txBody>
+          <a:bodyPr/>
+          <a:lstStyle/>
+          <a:p>
+            <a:fld id="{31DE2C5B-556E-47B8-A792-024C2FCA4ACC}" type="slidenum">
+              <a:rPr lang="en-GB" smtClean="0"/>
+              <a:t>14</a:t>
+            </a:fld>
+            <a:endParaRPr lang="en-GB"/>
+          </a:p>
+        </p:txBody>
+      </p:sp>
+      <p:pic>
+        <p:nvPicPr>
+          <p:cNvPr id="7" name="Picture 6">
+            <a:extLst>
+              <a:ext uri="{FF2B5EF4-FFF2-40B4-BE49-F238E27FC236}">
+                <a16:creationId xmlns:a16="http://schemas.microsoft.com/office/drawing/2014/main" id="{C6D025F4-00FB-70AE-EC36-E6052E64BD83}"/>
+              </a:ext>
+            </a:extLst>
+          </p:cNvPr>
+          <p:cNvPicPr>
+            <a:picLocks noChangeAspect="1"/>
+          </p:cNvPicPr>
+          <p:nvPr/>
+        </p:nvPicPr>
+        <p:blipFill>
+          <a:blip r:embed="rId3"/>
+          <a:stretch>
+            <a:fillRect/>
+          </a:stretch>
+        </p:blipFill>
+        <p:spPr>
+          <a:xfrm>
+            <a:off x="8756976" y="3095886"/>
+            <a:ext cx="1880433" cy="1880433"/>
+          </a:xfrm>
+          <a:prstGeom prst="rect">
+            <a:avLst/>
+          </a:prstGeom>
+        </p:spPr>
+      </p:pic>
+    </p:spTree>
+    <p:extLst>
+      <p:ext uri="{BB962C8B-B14F-4D97-AF65-F5344CB8AC3E}">
+        <p14:creationId xmlns:p14="http://schemas.microsoft.com/office/powerpoint/2010/main" val="2386740547"/>
+      </p:ext>
+    </p:extLst>
+  </p:cSld>
+  <p:clrMapOvr>
+    <a:masterClrMapping/>
+  </p:clrMapOvr>
+</p:sld>
+</file>
+
+<file path=ppt/slides/slide15.xml><?xml version="1.0" encoding="utf-8"?>
+<p:sld xmlns:a="http://schemas.openxmlformats.org/drawingml/2006/main" xmlns:r="http://schemas.openxmlformats.org/officeDocument/2006/relationships" xmlns:p="http://schemas.openxmlformats.org/presentationml/2006/main">
+  <p:cSld>
+    <p:spTree>
+      <p:nvGrpSpPr>
         <p:cNvPr id="1" name=""/>
         <p:cNvGrpSpPr/>
         <p:nvPr/>
@@ -4591,7 +4778,7 @@
           <a:p>
             <a:r>
               <a:rPr lang="en-US" dirty="0"/>
-              <a:t>(Mac) 5. Android Studio</a:t>
+              <a:t>(Mac) 6. Android Studio</a:t>
             </a:r>
             <a:endParaRPr lang="en-IT" dirty="0"/>
           </a:p>
@@ -4665,7 +4852,7 @@
                 <a:ea typeface="Palatino" pitchFamily="2" charset="77"/>
                 <a:hlinkClick r:id="rId3"/>
               </a:rPr>
-              <a:t>https://docs.flutter.dev/get-started/install/macos/mobile-android?tab=vscode#configure-android-development</a:t>
+              <a:t>https://docs.flutter.dev/platform-integration/android/setup#set-up-tooling</a:t>
             </a:r>
             <a:r>
               <a:rPr lang="en-GB" dirty="0">
@@ -4679,20 +4866,11 @@
               <a:buFont typeface="+mj-lt"/>
               <a:buAutoNum type="arabicPeriod"/>
             </a:pPr>
-            <a:endParaRPr lang="en-GB" dirty="0">
-              <a:ea typeface="Palatino" pitchFamily="2" charset="77"/>
-            </a:endParaRPr>
-          </a:p>
-          <a:p>
-            <a:pPr marL="457200" indent="-457200">
-              <a:buFont typeface="+mj-lt"/>
-              <a:buAutoNum type="arabicPeriod"/>
-            </a:pPr>
             <a:r>
               <a:rPr lang="en-GB" dirty="0">
                 <a:ea typeface="Palatino" pitchFamily="2" charset="77"/>
               </a:rPr>
-              <a:t>Follow the instructions from section ”Configure Android development” to the end </a:t>
+              <a:t>Follow the instructions from section ”Set up Android tooling” to the end </a:t>
             </a:r>
           </a:p>
         </p:txBody>
@@ -4720,7 +4898,7 @@
           <a:p>
             <a:fld id="{31DE2C5B-556E-47B8-A792-024C2FCA4ACC}" type="slidenum">
               <a:rPr lang="en-GB" smtClean="0"/>
-              <a:t>14</a:t>
+              <a:t>15</a:t>
             </a:fld>
             <a:endParaRPr lang="en-GB"/>
           </a:p>
@@ -4769,7 +4947,7 @@
 </p:sld>
 </file>
 
-<file path=ppt/slides/slide15.xml><?xml version="1.0" encoding="utf-8"?>
+<file path=ppt/slides/slide16.xml><?xml version="1.0" encoding="utf-8"?>
 <p:sld xmlns:a="http://schemas.openxmlformats.org/drawingml/2006/main" xmlns:r="http://schemas.openxmlformats.org/officeDocument/2006/relationships" xmlns:p="http://schemas.openxmlformats.org/presentationml/2006/main">
   <p:cSld>
     <p:spTree>
@@ -4892,7 +5070,7 @@
           <a:p>
             <a:fld id="{31DE2C5B-556E-47B8-A792-024C2FCA4ACC}" type="slidenum">
               <a:rPr lang="en-GB" smtClean="0"/>
-              <a:t>15</a:t>
+              <a:t>16</a:t>
             </a:fld>
             <a:endParaRPr lang="en-GB"/>
           </a:p>
@@ -4941,7 +5119,7 @@
 </p:sld>
 </file>
 
-<file path=ppt/slides/slide16.xml><?xml version="1.0" encoding="utf-8"?>
+<file path=ppt/slides/slide17.xml><?xml version="1.0" encoding="utf-8"?>
 <p:sld xmlns:a="http://schemas.openxmlformats.org/drawingml/2006/main" xmlns:r="http://schemas.openxmlformats.org/officeDocument/2006/relationships" xmlns:p="http://schemas.openxmlformats.org/presentationml/2006/main">
   <p:cSld>
     <p:spTree>
@@ -5130,7 +5308,7 @@
           <a:p>
             <a:fld id="{31DE2C5B-556E-47B8-A792-024C2FCA4ACC}" type="slidenum">
               <a:rPr lang="en-GB" smtClean="0"/>
-              <a:t>16</a:t>
+              <a:t>17</a:t>
             </a:fld>
             <a:endParaRPr lang="en-GB"/>
           </a:p>
@@ -5996,7 +6174,7 @@
 </p:sld>
 </file>
 
-<file path=ppt/slides/slide17.xml><?xml version="1.0" encoding="utf-8"?>
+<file path=ppt/slides/slide18.xml><?xml version="1.0" encoding="utf-8"?>
 <p:sld xmlns:a="http://schemas.openxmlformats.org/drawingml/2006/main" xmlns:r="http://schemas.openxmlformats.org/officeDocument/2006/relationships" xmlns:p="http://schemas.openxmlformats.org/presentationml/2006/main">
   <p:cSld>
     <p:spTree>
@@ -6085,7 +6263,7 @@
                 <a:ea typeface="Palatino" pitchFamily="2" charset="77"/>
                 <a:hlinkClick r:id="rId2"/>
               </a:rPr>
-              <a:t>https://docs.flutter.dev/get-started/install/windows/mobile?tab=vscode#install-the-flutter-sdk</a:t>
+              <a:t>https://docs.flutter.dev/install/quick#install</a:t>
             </a:r>
             <a:r>
               <a:rPr lang="en-GB" dirty="0">
@@ -6103,7 +6281,7 @@
               <a:rPr lang="en-GB" dirty="0">
                 <a:ea typeface="Palatino" pitchFamily="2" charset="77"/>
               </a:rPr>
-              <a:t>Follow the instructions of section ”Install the Flutter SDK”</a:t>
+              <a:t>Follow the instructions of section ”Install and set up Flutter” to the end</a:t>
             </a:r>
           </a:p>
         </p:txBody>
@@ -6131,7 +6309,7 @@
           <a:p>
             <a:fld id="{31DE2C5B-556E-47B8-A792-024C2FCA4ACC}" type="slidenum">
               <a:rPr lang="en-GB" smtClean="0"/>
-              <a:t>17</a:t>
+              <a:t>18</a:t>
             </a:fld>
             <a:endParaRPr lang="en-GB"/>
           </a:p>
@@ -6209,12 +6387,18 @@
 </p:sld>
 </file>
 
-<file path=ppt/slides/slide18.xml><?xml version="1.0" encoding="utf-8"?>
+<file path=ppt/slides/slide19.xml><?xml version="1.0" encoding="utf-8"?>
 <p:sld xmlns:a="http://schemas.openxmlformats.org/drawingml/2006/main" xmlns:r="http://schemas.openxmlformats.org/officeDocument/2006/relationships" xmlns:p="http://schemas.openxmlformats.org/presentationml/2006/main">
   <p:cSld>
     <p:spTree>
       <p:nvGrpSpPr>
-        <p:cNvPr id="1" name=""/>
+        <p:cNvPr id="1" name="">
+          <a:extLst>
+            <a:ext uri="{FF2B5EF4-FFF2-40B4-BE49-F238E27FC236}">
+              <a16:creationId xmlns:a16="http://schemas.microsoft.com/office/drawing/2014/main" id="{B8E935FA-5FD9-2834-5B27-5D44BFDD01C5}"/>
+            </a:ext>
+          </a:extLst>
+        </p:cNvPr>
         <p:cNvGrpSpPr/>
         <p:nvPr/>
       </p:nvGrpSpPr>
@@ -6231,7 +6415,7 @@
           <p:cNvPr id="2" name="Title 1">
             <a:extLst>
               <a:ext uri="{FF2B5EF4-FFF2-40B4-BE49-F238E27FC236}">
-                <a16:creationId xmlns:a16="http://schemas.microsoft.com/office/drawing/2014/main" id="{DCEB9E4F-F82C-A64F-809D-B943BB0A7B79}"/>
+                <a16:creationId xmlns:a16="http://schemas.microsoft.com/office/drawing/2014/main" id="{6FE71FA6-B652-1ED4-4E63-567B4F484055}"/>
               </a:ext>
             </a:extLst>
           </p:cNvPr>
@@ -6260,7 +6444,7 @@
           <p:cNvPr id="3" name="Content Placeholder 2">
             <a:extLst>
               <a:ext uri="{FF2B5EF4-FFF2-40B4-BE49-F238E27FC236}">
-                <a16:creationId xmlns:a16="http://schemas.microsoft.com/office/drawing/2014/main" id="{07EEA99A-73A7-F949-9D8F-EEED9045B6FA}"/>
+                <a16:creationId xmlns:a16="http://schemas.microsoft.com/office/drawing/2014/main" id="{7ECBA2C3-3492-407D-2887-3BA92DB79E58}"/>
               </a:ext>
             </a:extLst>
           </p:cNvPr>
@@ -6274,7 +6458,7 @@
         <p:spPr>
           <a:xfrm>
             <a:off x="428172" y="1364342"/>
-            <a:ext cx="10081642" cy="2918291"/>
+            <a:ext cx="10081642" cy="3855840"/>
           </a:xfrm>
         </p:spPr>
         <p:txBody>
@@ -6323,7 +6507,7 @@
                 <a:ea typeface="Palatino" pitchFamily="2" charset="77"/>
                 <a:hlinkClick r:id="rId3"/>
               </a:rPr>
-              <a:t>https://docs.flutter.dev/get-started/install/windows/mobile?tab=vscode#configure-android-development</a:t>
+              <a:t>https://docs.flutter.dev/platform-integration/android/setup#set-up-tooling</a:t>
             </a:r>
             <a:r>
               <a:rPr lang="en-GB" dirty="0">
@@ -6341,7 +6525,7 @@
               <a:rPr lang="en-GB" dirty="0">
                 <a:ea typeface="Palatino" pitchFamily="2" charset="77"/>
               </a:rPr>
-              <a:t>Follow the instructions from section ”Configure Android development” to the end </a:t>
+              <a:t>Follow the instructions from section ”Set up Android tooling” to the end </a:t>
             </a:r>
           </a:p>
         </p:txBody>
@@ -6351,7 +6535,7 @@
           <p:cNvPr id="4" name="Slide Number Placeholder 3">
             <a:extLst>
               <a:ext uri="{FF2B5EF4-FFF2-40B4-BE49-F238E27FC236}">
-                <a16:creationId xmlns:a16="http://schemas.microsoft.com/office/drawing/2014/main" id="{ED05C487-70B4-174B-A325-CCA9C11792FF}"/>
+                <a16:creationId xmlns:a16="http://schemas.microsoft.com/office/drawing/2014/main" id="{725D0209-F4BA-ECF4-00C5-E38FAD819B58}"/>
               </a:ext>
             </a:extLst>
           </p:cNvPr>
@@ -6369,7 +6553,7 @@
           <a:p>
             <a:fld id="{31DE2C5B-556E-47B8-A792-024C2FCA4ACC}" type="slidenum">
               <a:rPr lang="en-GB" smtClean="0"/>
-              <a:t>18</a:t>
+              <a:t>19</a:t>
             </a:fld>
             <a:endParaRPr lang="en-GB"/>
           </a:p>
@@ -6380,7 +6564,7 @@
           <p:cNvPr id="7" name="Picture 6">
             <a:extLst>
               <a:ext uri="{FF2B5EF4-FFF2-40B4-BE49-F238E27FC236}">
-                <a16:creationId xmlns:a16="http://schemas.microsoft.com/office/drawing/2014/main" id="{74F8412E-AD7D-F440-B9DC-40A7E6798B6B}"/>
+                <a16:creationId xmlns:a16="http://schemas.microsoft.com/office/drawing/2014/main" id="{A2186012-D7E6-F6F8-25DB-721082D8F751}"/>
               </a:ext>
             </a:extLst>
           </p:cNvPr>
@@ -6397,7 +6581,7 @@
         </p:blipFill>
         <p:spPr>
           <a:xfrm>
-            <a:off x="8932649" y="3971823"/>
+            <a:off x="9071545" y="4110719"/>
             <a:ext cx="2017002" cy="2017002"/>
           </a:xfrm>
           <a:prstGeom prst="rect">
@@ -6408,7 +6592,7 @@
     </p:spTree>
     <p:extLst>
       <p:ext uri="{BB962C8B-B14F-4D97-AF65-F5344CB8AC3E}">
-        <p14:creationId xmlns:p14="http://schemas.microsoft.com/office/powerpoint/2010/main" val="4143587887"/>
+        <p14:creationId xmlns:p14="http://schemas.microsoft.com/office/powerpoint/2010/main" val="1942001813"/>
       </p:ext>
     </p:extLst>
   </p:cSld>
@@ -6931,6 +7115,7 @@
             </a:pPr>
             <a:r>
               <a:rPr lang="en-GB" b="1" dirty="0">
+                <a:latin typeface="Aptos" panose="020B0004020202020204" pitchFamily="34" charset="0"/>
                 <a:ea typeface="Palatino" pitchFamily="2" charset="77"/>
               </a:rPr>
               <a:t>Flutter + Dart</a:t>
@@ -6943,6 +7128,7 @@
             </a:pPr>
             <a:r>
               <a:rPr lang="en-GB" dirty="0">
+                <a:latin typeface="Aptos" panose="020B0004020202020204" pitchFamily="34" charset="0"/>
                 <a:ea typeface="Palatino" pitchFamily="2" charset="77"/>
               </a:rPr>
               <a:t>(The framework and its programming language)</a:t>
@@ -7332,6 +7518,7 @@
             </a:pPr>
             <a:r>
               <a:rPr lang="en-GB" b="1" dirty="0">
+                <a:latin typeface="Aptos" panose="020B0004020202020204" pitchFamily="34" charset="0"/>
                 <a:ea typeface="Palatino" pitchFamily="2" charset="77"/>
               </a:rPr>
               <a:t>Android Studio</a:t>
@@ -7344,6 +7531,7 @@
             </a:pPr>
             <a:r>
               <a:rPr lang="en-GB" dirty="0">
+                <a:latin typeface="Aptos" panose="020B0004020202020204" pitchFamily="34" charset="0"/>
                 <a:ea typeface="Palatino" pitchFamily="2" charset="77"/>
               </a:rPr>
               <a:t>(For Android support)</a:t>
@@ -7564,6 +7752,7 @@
             </a:pPr>
             <a:r>
               <a:rPr lang="en-GB" b="1" dirty="0">
+                <a:latin typeface="Aptos" panose="020B0004020202020204" pitchFamily="34" charset="0"/>
                 <a:ea typeface="Palatino" pitchFamily="2" charset="77"/>
               </a:rPr>
               <a:t>XCode</a:t>
@@ -7576,6 +7765,7 @@
             </a:pPr>
             <a:r>
               <a:rPr lang="en-GB" dirty="0">
+                <a:latin typeface="Aptos" panose="020B0004020202020204" pitchFamily="34" charset="0"/>
                 <a:ea typeface="Palatino" pitchFamily="2" charset="77"/>
               </a:rPr>
               <a:t>(For iOS support)</a:t>
@@ -7796,6 +7986,7 @@
             </a:pPr>
             <a:r>
               <a:rPr lang="en-GB" b="1" dirty="0">
+                <a:latin typeface="Aptos" panose="020B0004020202020204" pitchFamily="34" charset="0"/>
                 <a:ea typeface="Palatino" pitchFamily="2" charset="77"/>
               </a:rPr>
               <a:t>VCS</a:t>
@@ -7808,6 +7999,7 @@
             </a:pPr>
             <a:r>
               <a:rPr lang="en-GB" dirty="0">
+                <a:latin typeface="Aptos" panose="020B0004020202020204" pitchFamily="34" charset="0"/>
                 <a:ea typeface="Palatino" pitchFamily="2" charset="77"/>
               </a:rPr>
               <a:t>(For version control and to enable teamwork)</a:t>
